--- a/submission/PauseGuard_Submission.pptx
+++ b/submission/PauseGuard_Submission.pptx
@@ -11014,7 +11014,7 @@
                 <a:ea typeface="Google Sans Flex"/>
                 <a:cs typeface="Google Sans Flex"/>
               </a:rPr>
-              <a:t>The customer sees exactly why: numbered boxes on their own screenshot, in English or Chinese. The analyst gets a live case file and can block the scammer for every customer in one click.</a:t>
+              <a:t>The customer sees exactly why: numbered boxes on their own screenshot, in plain English. The analyst gets a live case file and can block the scammer for every customer in one click.</a:t>
             </a:r>
           </a:p>
         </p:txBody>
@@ -11827,7 +11827,7 @@
                 <a:ea typeface="Google Sans Flex"/>
                 <a:cs typeface="Google Sans Flex"/>
               </a:rPr>
-              <a:t>Explanations in English or Chinese; no blame, plain language</a:t>
+              <a:t>Plain-English explanations; no blame</a:t>
             </a:r>
           </a:p>
           <a:p>
@@ -12827,7 +12827,7 @@
                 <a:ea typeface="Google Sans Flex"/>
                 <a:cs typeface="Google Sans Flex"/>
               </a:rPr>
-              <a:t>The same RED for Mrs Tan, in Chinese</a:t>
+              <a:t>The red flags, numbered on her own screenshot</a:t>
             </a:r>
           </a:p>
         </p:txBody>
